--- a/clients/juhi-agarwal-nexther/neXtHer-Proposal.pptx
+++ b/clients/juhi-agarwal-nexther/neXtHer-Proposal.pptx
@@ -2914,11 +2914,11 @@
         <p:spPr>
           <a:xfrm>
             <a:off x="640080" y="2148840"/>
-            <a:ext cx="3383280" cy="3657600"/>
+            <a:ext cx="3383280" cy="3154680"/>
           </a:xfrm>
           <a:prstGeom prst="roundRect">
             <a:avLst>
-              <a:gd name="adj" fmla="val 3784"/>
+              <a:gd name="adj" fmla="val 4058"/>
             </a:avLst>
           </a:prstGeom>
           <a:solidFill>
@@ -3225,11 +3225,11 @@
         <p:spPr>
           <a:xfrm>
             <a:off x="4389120" y="2148840"/>
-            <a:ext cx="3383280" cy="3657600"/>
+            <a:ext cx="3383280" cy="3154680"/>
           </a:xfrm>
           <a:prstGeom prst="roundRect">
             <a:avLst>
-              <a:gd name="adj" fmla="val 3784"/>
+              <a:gd name="adj" fmla="val 4058"/>
             </a:avLst>
           </a:prstGeom>
           <a:solidFill>
@@ -3536,11 +3536,11 @@
         <p:spPr>
           <a:xfrm>
             <a:off x="8138160" y="2148840"/>
-            <a:ext cx="3383280" cy="3657600"/>
+            <a:ext cx="3383280" cy="3154680"/>
           </a:xfrm>
           <a:prstGeom prst="roundRect">
             <a:avLst>
-              <a:gd name="adj" fmla="val 3784"/>
+              <a:gd name="adj" fmla="val 4058"/>
             </a:avLst>
           </a:prstGeom>
           <a:solidFill>
@@ -6914,8 +6914,8 @@
         </p:nvSpPr>
         <p:spPr>
           <a:xfrm>
-            <a:off x="-1554480" y="4206240"/>
-            <a:ext cx="4206240" cy="4206240"/>
+            <a:off x="-2651760" y="5669280"/>
+            <a:ext cx="3657600" cy="3657600"/>
           </a:xfrm>
           <a:prstGeom prst="ellipse">
             <a:avLst/>
@@ -7348,11 +7348,11 @@
         <p:spPr>
           <a:xfrm>
             <a:off x="8321040" y="1874520"/>
-            <a:ext cx="3200400" cy="2286000"/>
+            <a:ext cx="3200400" cy="1783080"/>
           </a:xfrm>
           <a:prstGeom prst="roundRect">
             <a:avLst>
-              <a:gd name="adj" fmla="val 5600"/>
+              <a:gd name="adj" fmla="val 7179"/>
             </a:avLst>
           </a:prstGeom>
           <a:solidFill>
@@ -8639,11 +8639,11 @@
         <p:spPr>
           <a:xfrm>
             <a:off x="640080" y="2103120"/>
-            <a:ext cx="4114800" cy="3200400"/>
+            <a:ext cx="4114800" cy="2834640"/>
           </a:xfrm>
           <a:prstGeom prst="roundRect">
             <a:avLst>
-              <a:gd name="adj" fmla="val 4000"/>
+              <a:gd name="adj" fmla="val 4516"/>
             </a:avLst>
           </a:prstGeom>
           <a:solidFill>
@@ -8959,7 +8959,7 @@
         </p:nvSpPr>
         <p:spPr>
           <a:xfrm>
-            <a:off x="5074920" y="3337560"/>
+            <a:off x="5074920" y="3538728"/>
             <a:ext cx="457200" cy="457200"/>
           </a:xfrm>
           <a:prstGeom prst="ellipse">
@@ -8979,7 +8979,7 @@
         </p:nvSpPr>
         <p:spPr>
           <a:xfrm>
-            <a:off x="5074920" y="3337560"/>
+            <a:off x="5074920" y="3538728"/>
             <a:ext cx="457200" cy="457200"/>
           </a:xfrm>
           <a:prstGeom prst="rect">
@@ -9018,7 +9018,7 @@
         </p:nvSpPr>
         <p:spPr>
           <a:xfrm>
-            <a:off x="5760720" y="3300984"/>
+            <a:off x="5760720" y="3502152"/>
             <a:ext cx="5760720" cy="320040"/>
           </a:xfrm>
           <a:prstGeom prst="rect">
@@ -9057,7 +9057,7 @@
         </p:nvSpPr>
         <p:spPr>
           <a:xfrm>
-            <a:off x="5760720" y="3648456"/>
+            <a:off x="5760720" y="3849624"/>
             <a:ext cx="5760720" cy="640080"/>
           </a:xfrm>
           <a:prstGeom prst="rect">
@@ -9099,7 +9099,7 @@
         </p:nvSpPr>
         <p:spPr>
           <a:xfrm>
-            <a:off x="5074920" y="4434840"/>
+            <a:off x="5074920" y="4837176"/>
             <a:ext cx="457200" cy="457200"/>
           </a:xfrm>
           <a:prstGeom prst="ellipse">
@@ -9119,7 +9119,7 @@
         </p:nvSpPr>
         <p:spPr>
           <a:xfrm>
-            <a:off x="5074920" y="4434840"/>
+            <a:off x="5074920" y="4837176"/>
             <a:ext cx="457200" cy="457200"/>
           </a:xfrm>
           <a:prstGeom prst="rect">
@@ -9158,7 +9158,7 @@
         </p:nvSpPr>
         <p:spPr>
           <a:xfrm>
-            <a:off x="5760720" y="4398264"/>
+            <a:off x="5760720" y="4800600"/>
             <a:ext cx="5760720" cy="320040"/>
           </a:xfrm>
           <a:prstGeom prst="rect">
@@ -9197,7 +9197,7 @@
         </p:nvSpPr>
         <p:spPr>
           <a:xfrm>
-            <a:off x="5760720" y="4745736"/>
+            <a:off x="5760720" y="5148072"/>
             <a:ext cx="5760720" cy="640080"/>
           </a:xfrm>
           <a:prstGeom prst="rect">
@@ -10252,24 +10252,24 @@
         </p:nvSpPr>
         <p:spPr>
           <a:xfrm>
-            <a:off x="640080" y="1463040"/>
-            <a:ext cx="3657600" cy="1554480"/>
-          </a:xfrm>
-          <a:prstGeom prst="rect">
-            <a:avLst/>
-          </a:prstGeom>
-          <a:noFill/>
-          <a:ln/>
-        </p:spPr>
-        <p:txBody>
-          <a:bodyPr wrap="square" lIns="0" tIns="0" rIns="0" bIns="0" rtlCol="0" anchor="ctr"/>
-          <a:lstStyle/>
-          <a:p>
-            <a:pPr indent="0" marL="0">
-              <a:buNone/>
-            </a:pPr>
-            <a:r>
-              <a:rPr lang="en-US" sz="9600" b="1" dirty="0">
+            <a:off x="640080" y="1508760"/>
+            <a:ext cx="3657600" cy="1188720"/>
+          </a:xfrm>
+          <a:prstGeom prst="rect">
+            <a:avLst/>
+          </a:prstGeom>
+          <a:noFill/>
+          <a:ln/>
+        </p:spPr>
+        <p:txBody>
+          <a:bodyPr wrap="square" lIns="0" tIns="0" rIns="0" bIns="0" rtlCol="0" anchor="ctr"/>
+          <a:lstStyle/>
+          <a:p>
+            <a:pPr indent="0" marL="0">
+              <a:buNone/>
+            </a:pPr>
+            <a:r>
+              <a:rPr lang="en-US" sz="10500" b="1" dirty="0">
                 <a:solidFill>
                   <a:srgbClr val="D9A441"/>
                 </a:solidFill>
@@ -10279,7 +10279,7 @@
               </a:rPr>
               <a:t>34</a:t>
             </a:r>
-            <a:endParaRPr lang="en-US" sz="9600" dirty="0"/>
+            <a:endParaRPr lang="en-US" sz="10500" dirty="0"/>
           </a:p>
         </p:txBody>
       </p:sp>
@@ -10291,7 +10291,7 @@
         </p:nvSpPr>
         <p:spPr>
           <a:xfrm>
-            <a:off x="640080" y="2971800"/>
+            <a:off x="640080" y="2743200"/>
             <a:ext cx="4572000" cy="365760"/>
           </a:xfrm>
           <a:prstGeom prst="rect">
@@ -11178,11 +11178,11 @@
         <p:spPr>
           <a:xfrm>
             <a:off x="8503920" y="731520"/>
-            <a:ext cx="3017520" cy="1371600"/>
+            <a:ext cx="3017520" cy="1097280"/>
           </a:xfrm>
           <a:prstGeom prst="roundRect">
             <a:avLst>
-              <a:gd name="adj" fmla="val 9333"/>
+              <a:gd name="adj" fmla="val 11667"/>
             </a:avLst>
           </a:prstGeom>
           <a:solidFill>
